--- a/docs/team 15 review-III ppt.pptx
+++ b/docs/team 15 review-III ppt.pptx
@@ -3313,13 +3313,19 @@
           <a:p>
             <a:r>
               <a:rPr sz="1400"/>
-              <a:t>•  MAPE reduction vs statistical baseline: 36.9 %</a:t>
+              <a:t>•  MAPE reduction vs statistical baseline: 36.9 % lower error</a:t>
             </a:r>
           </a:p>
           <a:p>
             <a:r>
               <a:rPr sz="1400"/>
-              <a:t>•  Inventory holding cost -23.4 %, stock-outs +13.8 %, fill rate 97.76 %</a:t>
+              <a:t>•  Inventory: total cost down 2.1 % at matched service; stock-outs down 25 % under a lead-time disruption</a:t>
+            </a:r>
+          </a:p>
+          <a:p>
+            <a:r>
+              <a:rPr sz="1400"/>
+              <a:t>•  Delay risk: F1 0.722 (target 0.85 not met - documented); lead-time sigma_L = 1.27 days measured on DataCo</a:t>
             </a:r>
           </a:p>
         </p:txBody>
@@ -3745,31 +3751,31 @@
           <a:p>
             <a:r>
               <a:rPr sz="1400"/>
-              <a:t>•  Same demand and same lead-time draws for both policies (common random numbers)</a:t>
+              <a:t>•  Controlled study: both policies face identical demand and identical lead-time draws</a:t>
             </a:r>
           </a:p>
           <a:p>
             <a:r>
               <a:rPr sz="1400"/>
-              <a:t>•  Holding cost -23.4 %, stock-outs +13.8 %, total cost +1.4 %</a:t>
+              <a:t>•  E1 - forecast alone (same formula both sides): total cost down 3.07 %, stock-outs down 3.50 %</a:t>
             </a:r>
           </a:p>
           <a:p>
             <a:r>
               <a:rPr sz="1400"/>
-              <a:t>•  Service level (fill rate) 97.76 % vs 0.00 % for the static policy</a:t>
+              <a:t>•  E2 - as-designed risk-aware policy vs traditional practice: total cost down 2.12 % at matched service</a:t>
             </a:r>
           </a:p>
           <a:p>
             <a:r>
               <a:rPr sz="1400"/>
-              <a:t>•  Benefit concentrated in class-A SKUs — directly actionable deployment insight</a:t>
-            </a:r>
-          </a:p>
-          <a:p>
-            <a:r>
-              <a:rPr sz="1400"/>
-              <a:t>•  Outputs per-SKU safety stock, ROP, EOQ, days of cover and reorder alerts</a:t>
+              <a:t>•  E3 - LEAD-TIME DISRUPTION (3x variability): fill rate 95.14 % -&gt; 96.36 %, stock-outs down 25.0 %, total cost down 13.5 %</a:t>
+            </a:r>
+          </a:p>
+          <a:p>
+            <a:r>
+              <a:rPr sz="1200"/>
+              <a:t>•  HONEST NEGATIVE RESULT: the 15-20 % holding-cost target is NOT met (holding cost up 0.59 % at matched service) - a better forecast buys resilience, not cycle-stock savings</a:t>
             </a:r>
           </a:p>
         </p:txBody>
@@ -3955,37 +3961,37 @@
           <a:p>
             <a:r>
               <a:rPr sz="1400"/>
-              <a:t>•  O1 forecasting: MAPE 12.11 % and 36.9 % better than SARIMA — target ≥25 % ACHIEVED</a:t>
+              <a:t>•  O1 forecasting: MAPE 12.11 % and 36.9 % better than SARIMA - target &gt;=25 % ACHIEVED</a:t>
+            </a:r>
+          </a:p>
+          <a:p>
+            <a:r>
+              <a:rPr sz="1200"/>
+              <a:t>•  O2 inventory: total cost down 2.12 % at matched service, stock-outs down 25 % under disruption - PARTIALLY ACHIEVED (holding-cost target not met, documented)</a:t>
             </a:r>
           </a:p>
           <a:p>
             <a:r>
               <a:rPr sz="1400"/>
-              <a:t>•  O2 inventory: holding -23.4 %, stock-outs +13.8 % — ACHIEVED</a:t>
+              <a:t>•  O3 risk: F1 0.722 - target 0.85, PARTIALLY ACHIEVED (cause diagnosed)</a:t>
             </a:r>
           </a:p>
           <a:p>
             <a:r>
               <a:rPr sz="1400"/>
-              <a:t>•  O3 risk: F1 0.722 — target 0.85, PARTIALLY achieved (documented)</a:t>
+              <a:t>•  O4 dashboard: 5-tab Streamlit app with a live risk calculator - ACHIEVED</a:t>
             </a:r>
           </a:p>
           <a:p>
             <a:r>
               <a:rPr sz="1400"/>
-              <a:t>•  O4 dashboard: 7 modules delivered — ACHIEVED</a:t>
+              <a:t>•  O5 benchmarking: 3 datasets, temporal hold-out, ablation, matched subset, service-matched policy study - ACHIEVED</a:t>
             </a:r>
           </a:p>
           <a:p>
             <a:r>
               <a:rPr sz="1400"/>
-              <a:t>•  O5 benchmarking: 3 datasets, temporal hold-out, ablation, matched subset — ACHIEVED</a:t>
-            </a:r>
-          </a:p>
-          <a:p>
-            <a:r>
-              <a:rPr sz="1400"/>
-              <a:t>•  O6 reproducibility: one-command pipeline with fixed seeds — ACHIEVED</a:t>
+              <a:t>•  O6 reproducibility: one-command pipeline with fixed seeds and auto-generated report - ACHIEVED</a:t>
             </a:r>
           </a:p>
         </p:txBody>
